--- a/tests/fixtures/template-brand.pptx
+++ b/tests/fixtures/template-brand.pptx
@@ -2155,7 +2155,7 @@
         <p:spPr>
           <a:xfrm>
             <a:off x="853440" y="1851660"/>
-            <a:ext cx="7071359" cy="3909059"/>
+            <a:ext cx="7071359" cy="2057400"/>
           </a:xfrm>
         </p:spPr>
         <p:txBody>
@@ -2239,8 +2239,8 @@
         </p:nvSpPr>
         <p:spPr>
           <a:xfrm>
-            <a:off x="457200" y="1435100"/>
-            <a:ext cx="3008313" cy="4691063"/>
+            <a:off x="853440" y="4114800"/>
+            <a:ext cx="7071359" cy="1645920"/>
           </a:xfrm>
         </p:spPr>
         <p:txBody>
